--- a/Roberts-hatchery-genetics.pptx
+++ b/Roberts-hatchery-genetics.pptx
@@ -2152,7 +2152,7 @@
                 <a:ea typeface="Inter" pitchFamily="34" charset="-122"/>
                 <a:cs typeface="Inter" pitchFamily="34" charset="-120"/>
               </a:rPr>
-              <a:t>International Shellfish Restoration Society</a:t>
+              <a:t>International Conference on Shellfish Restoration</a:t>
             </a:r>
             <a:endParaRPr lang="en-US" sz="1200" dirty="0"/>
           </a:p>
